--- a/templates/posts/october/2026-10-20-tue-ig-foundation-courses.pptx
+++ b/templates/posts/october/2026-10-20-tue-ig-foundation-courses.pptx
@@ -3802,7 +3802,7 @@
       <p:grpSpPr/>
       <p:pic>
         <p:nvPicPr>
-          <p:cNvPr id="2" name="Picture 1" descr="5065654642693712172.jpg"/>
+          <p:cNvPr id="2" name="Picture 1" descr="8244684265299779583.jpg"/>
           <p:cNvPicPr>
             <a:picLocks noChangeAspect="1"/>
           </p:cNvPicPr>

--- a/templates/posts/october/2026-10-20-tue-ig-foundation-courses.pptx
+++ b/templates/posts/october/2026-10-20-tue-ig-foundation-courses.pptx
@@ -3802,7 +3802,7 @@
       <p:grpSpPr/>
       <p:pic>
         <p:nvPicPr>
-          <p:cNvPr id="2" name="Picture 1" descr="8244684265299779583.jpg"/>
+          <p:cNvPr id="2" name="Picture 1" descr="7370488203569884405.jpg"/>
           <p:cNvPicPr>
             <a:picLocks noChangeAspect="1"/>
           </p:cNvPicPr>

--- a/templates/posts/october/2026-10-20-tue-ig-foundation-courses.pptx
+++ b/templates/posts/october/2026-10-20-tue-ig-foundation-courses.pptx
@@ -3802,7 +3802,7 @@
       <p:grpSpPr/>
       <p:pic>
         <p:nvPicPr>
-          <p:cNvPr id="2" name="Picture 1" descr="7370488203569884405.jpg"/>
+          <p:cNvPr id="2" name="Picture 1" descr="2438379057656213803.jpg"/>
           <p:cNvPicPr>
             <a:picLocks noChangeAspect="1"/>
           </p:cNvPicPr>

--- a/templates/posts/october/2026-10-20-tue-ig-foundation-courses.pptx
+++ b/templates/posts/october/2026-10-20-tue-ig-foundation-courses.pptx
@@ -3802,7 +3802,7 @@
       <p:grpSpPr/>
       <p:pic>
         <p:nvPicPr>
-          <p:cNvPr id="2" name="Picture 1" descr="2438379057656213803.jpg"/>
+          <p:cNvPr id="2" name="Picture 1" descr="329598772040783188.jpg"/>
           <p:cNvPicPr>
             <a:picLocks noChangeAspect="1"/>
           </p:cNvPicPr>

--- a/templates/posts/october/2026-10-20-tue-ig-foundation-courses.pptx
+++ b/templates/posts/october/2026-10-20-tue-ig-foundation-courses.pptx
@@ -3802,7 +3802,7 @@
       <p:grpSpPr/>
       <p:pic>
         <p:nvPicPr>
-          <p:cNvPr id="2" name="Picture 1" descr="329598772040783188.jpg"/>
+          <p:cNvPr id="2" name="Picture 1" descr="3502837338128105510.jpg"/>
           <p:cNvPicPr>
             <a:picLocks noChangeAspect="1"/>
           </p:cNvPicPr>
@@ -3946,92 +3946,33 @@
           </a:p>
         </p:txBody>
       </p:sp>
-      <p:sp>
-        <p:nvSpPr>
-          <p:cNvPr id="6" name="Oval 5"/>
-          <p:cNvSpPr/>
+      <p:pic>
+        <p:nvPicPr>
+          <p:cNvPr id="6" name="Picture 5" descr="foundation-logo-white.png"/>
+          <p:cNvPicPr>
+            <a:picLocks noChangeAspect="1"/>
+          </p:cNvPicPr>
           <p:nvPr/>
-        </p:nvSpPr>
-        <p:spPr>
-          <a:xfrm>
-            <a:off x="8667750" y="11239500"/>
-            <a:ext cx="857250" cy="857250"/>
-          </a:xfrm>
-          <a:prstGeom prst="ellipse">
-            <a:avLst/>
-          </a:prstGeom>
-          <a:noFill/>
-          <a:ln w="19050">
-            <a:solidFill>
-              <a:srgbClr val="F4F1EA"/>
-            </a:solidFill>
-          </a:ln>
-          <a:effectLst/>
-        </p:spPr>
-        <p:style>
-          <a:lnRef idx="1">
-            <a:schemeClr val="accent1"/>
-          </a:lnRef>
-          <a:fillRef idx="3">
-            <a:schemeClr val="accent1"/>
-          </a:fillRef>
-          <a:effectRef idx="2">
-            <a:schemeClr val="accent1"/>
-          </a:effectRef>
-          <a:fontRef idx="minor">
-            <a:schemeClr val="lt1"/>
-          </a:fontRef>
-        </p:style>
-        <p:txBody>
-          <a:bodyPr rtlCol="0" anchor="ctr"/>
-          <a:lstStyle/>
-          <a:p>
-            <a:pPr algn="ctr"/>
-          </a:p>
-        </p:txBody>
-      </p:sp>
-      <p:sp>
-        <p:nvSpPr>
-          <p:cNvPr id="7" name="TextBox 6"/>
-          <p:cNvSpPr txBox="1"/>
-          <p:nvPr/>
-        </p:nvSpPr>
-        <p:spPr>
-          <a:xfrm>
-            <a:off x="8667750" y="11239500"/>
-            <a:ext cx="857250" cy="857250"/>
+        </p:nvPicPr>
+        <p:blipFill>
+          <a:blip r:embed="rId4"/>
+          <a:stretch>
+            <a:fillRect/>
+          </a:stretch>
+        </p:blipFill>
+        <p:spPr>
+          <a:xfrm>
+            <a:off x="8571501" y="11239500"/>
+            <a:ext cx="953498" cy="857250"/>
           </a:xfrm>
           <a:prstGeom prst="rect">
             <a:avLst/>
           </a:prstGeom>
-          <a:noFill/>
-        </p:spPr>
-        <p:txBody>
-          <a:bodyPr wrap="square" lIns="0" rIns="0" tIns="0" bIns="0" anchor="ctr">
-            <a:spAutoFit/>
-          </a:bodyPr>
-          <a:lstStyle/>
-          <a:p>
-            <a:pPr algn="ctr">
-              <a:lnSpc>
-                <a:spcPct val="120000"/>
-              </a:lnSpc>
-            </a:pPr>
-            <a:r>
-              <a:rPr sz="1800" b="1" i="0">
-                <a:solidFill>
-                  <a:srgbClr val="F4F1EA"/>
-                </a:solidFill>
-                <a:latin typeface="Montserrat"/>
-              </a:rPr>
-              <a:t>LOGO</a:t>
-            </a:r>
-          </a:p>
-        </p:txBody>
-      </p:sp>
-      <p:sp>
-        <p:nvSpPr>
-          <p:cNvPr id="8" name="TextBox 7"/>
+        </p:spPr>
+      </p:pic>
+      <p:sp>
+        <p:nvSpPr>
+          <p:cNvPr id="7" name="TextBox 6"/>
           <p:cNvSpPr txBox="1"/>
           <p:nvPr/>
         </p:nvSpPr>
@@ -5199,92 +5140,33 @@
           </a:p>
         </p:txBody>
       </p:sp>
-      <p:sp>
-        <p:nvSpPr>
-          <p:cNvPr id="10" name="Oval 9"/>
-          <p:cNvSpPr/>
+      <p:pic>
+        <p:nvPicPr>
+          <p:cNvPr id="10" name="Picture 9" descr="foundation-logo-white.png"/>
+          <p:cNvPicPr>
+            <a:picLocks noChangeAspect="1"/>
+          </p:cNvPicPr>
           <p:nvPr/>
-        </p:nvSpPr>
-        <p:spPr>
-          <a:xfrm>
-            <a:off x="8667750" y="11239500"/>
-            <a:ext cx="857250" cy="857250"/>
-          </a:xfrm>
-          <a:prstGeom prst="ellipse">
-            <a:avLst/>
-          </a:prstGeom>
-          <a:noFill/>
-          <a:ln w="19050">
-            <a:solidFill>
-              <a:srgbClr val="F4F1EA"/>
-            </a:solidFill>
-          </a:ln>
-          <a:effectLst/>
-        </p:spPr>
-        <p:style>
-          <a:lnRef idx="1">
-            <a:schemeClr val="accent1"/>
-          </a:lnRef>
-          <a:fillRef idx="3">
-            <a:schemeClr val="accent1"/>
-          </a:fillRef>
-          <a:effectRef idx="2">
-            <a:schemeClr val="accent1"/>
-          </a:effectRef>
-          <a:fontRef idx="minor">
-            <a:schemeClr val="lt1"/>
-          </a:fontRef>
-        </p:style>
-        <p:txBody>
-          <a:bodyPr rtlCol="0" anchor="ctr"/>
-          <a:lstStyle/>
-          <a:p>
-            <a:pPr algn="ctr"/>
-          </a:p>
-        </p:txBody>
-      </p:sp>
-      <p:sp>
-        <p:nvSpPr>
-          <p:cNvPr id="11" name="TextBox 10"/>
-          <p:cNvSpPr txBox="1"/>
-          <p:nvPr/>
-        </p:nvSpPr>
-        <p:spPr>
-          <a:xfrm>
-            <a:off x="8667750" y="11239500"/>
-            <a:ext cx="857250" cy="857250"/>
+        </p:nvPicPr>
+        <p:blipFill>
+          <a:blip r:embed="rId3"/>
+          <a:stretch>
+            <a:fillRect/>
+          </a:stretch>
+        </p:blipFill>
+        <p:spPr>
+          <a:xfrm>
+            <a:off x="8571501" y="11239500"/>
+            <a:ext cx="953498" cy="857250"/>
           </a:xfrm>
           <a:prstGeom prst="rect">
             <a:avLst/>
           </a:prstGeom>
-          <a:noFill/>
-        </p:spPr>
-        <p:txBody>
-          <a:bodyPr wrap="square" lIns="0" rIns="0" tIns="0" bIns="0" anchor="ctr">
-            <a:spAutoFit/>
-          </a:bodyPr>
-          <a:lstStyle/>
-          <a:p>
-            <a:pPr algn="ctr">
-              <a:lnSpc>
-                <a:spcPct val="120000"/>
-              </a:lnSpc>
-            </a:pPr>
-            <a:r>
-              <a:rPr sz="1800" b="1" i="0">
-                <a:solidFill>
-                  <a:srgbClr val="F4F1EA"/>
-                </a:solidFill>
-                <a:latin typeface="Montserrat"/>
-              </a:rPr>
-              <a:t>LOGO</a:t>
-            </a:r>
-          </a:p>
-        </p:txBody>
-      </p:sp>
-      <p:sp>
-        <p:nvSpPr>
-          <p:cNvPr id="12" name="TextBox 11"/>
+        </p:spPr>
+      </p:pic>
+      <p:sp>
+        <p:nvSpPr>
+          <p:cNvPr id="11" name="TextBox 10"/>
           <p:cNvSpPr txBox="1"/>
           <p:nvPr/>
         </p:nvSpPr>

--- a/templates/posts/october/2026-10-20-tue-ig-foundation-courses.pptx
+++ b/templates/posts/october/2026-10-20-tue-ig-foundation-courses.pptx
@@ -3788,7 +3788,7 @@
     <p:bg>
       <p:bgPr>
         <a:solidFill>
-          <a:srgbClr val="22371F"/>
+          <a:srgbClr val="1E3F1D"/>
         </a:solidFill>
         <a:effectLst/>
       </p:bgPr>
@@ -3802,7 +3802,7 @@
       <p:grpSpPr/>
       <p:pic>
         <p:nvPicPr>
-          <p:cNvPr id="2" name="Picture 1" descr="3502837338128105510.jpg"/>
+          <p:cNvPr id="2" name="Picture 1" descr="8595789999434943757.jpg"/>
           <p:cNvPicPr>
             <a:picLocks noChangeAspect="1"/>
           </p:cNvPicPr>
@@ -3839,7 +3839,7 @@
             <a:avLst/>
           </a:prstGeom>
           <a:solidFill>
-            <a:srgbClr val="DBE6A7"/>
+            <a:srgbClr val="B1BCB1"/>
           </a:solidFill>
           <a:ln>
             <a:noFill/>
@@ -3898,7 +3898,7 @@
             <a:r>
               <a:rPr sz="2200" b="1" i="0" spc="200">
                 <a:solidFill>
-                  <a:srgbClr val="DBE6A7"/>
+                  <a:srgbClr val="B1BCB1"/>
                 </a:solidFill>
                 <a:latin typeface="Montserrat"/>
               </a:rPr>
@@ -3937,7 +3937,7 @@
             <a:r>
               <a:rPr sz="5600" b="1" i="0">
                 <a:solidFill>
-                  <a:srgbClr val="F4F1EA"/>
+                  <a:srgbClr val="F3F1EA"/>
                 </a:solidFill>
                 <a:latin typeface="Montserrat"/>
               </a:rPr>
@@ -4000,7 +4000,7 @@
             <a:r>
               <a:rPr sz="2000" b="0" i="0">
                 <a:solidFill>
-                  <a:srgbClr val="F4F1EA">
+                  <a:srgbClr val="F3F1EA">
                     <a:alpha val="60000"/>
                   </a:srgbClr>
                 </a:solidFill>
@@ -4025,7 +4025,7 @@
     <p:bg>
       <p:bgPr>
         <a:solidFill>
-          <a:srgbClr val="F4F1EA"/>
+          <a:srgbClr val="F3F1EA"/>
         </a:solidFill>
         <a:effectLst/>
       </p:bgPr>
@@ -4150,7 +4150,7 @@
             <a:r>
               <a:rPr sz="2000" b="1" i="0" spc="200">
                 <a:solidFill>
-                  <a:srgbClr val="156826"/>
+                  <a:srgbClr val="31662F"/>
                 </a:solidFill>
                 <a:latin typeface="Montserrat"/>
               </a:rPr>
@@ -4189,7 +4189,7 @@
             <a:r>
               <a:rPr sz="3800" b="0" i="0">
                 <a:solidFill>
-                  <a:srgbClr val="22371F"/>
+                  <a:srgbClr val="1E3F1D"/>
                 </a:solidFill>
                 <a:latin typeface="Source Sans 3"/>
               </a:rPr>
@@ -4253,7 +4253,7 @@
     <p:bg>
       <p:bgPr>
         <a:solidFill>
-          <a:srgbClr val="F4F1EA"/>
+          <a:srgbClr val="F3F1EA"/>
         </a:solidFill>
         <a:effectLst/>
       </p:bgPr>
@@ -4378,7 +4378,7 @@
             <a:r>
               <a:rPr sz="2000" b="1" i="0" spc="200">
                 <a:solidFill>
-                  <a:srgbClr val="156826"/>
+                  <a:srgbClr val="31662F"/>
                 </a:solidFill>
                 <a:latin typeface="Montserrat"/>
               </a:rPr>
@@ -4417,7 +4417,7 @@
             <a:r>
               <a:rPr sz="3800" b="0" i="0">
                 <a:solidFill>
-                  <a:srgbClr val="22371F"/>
+                  <a:srgbClr val="1E3F1D"/>
                 </a:solidFill>
                 <a:latin typeface="Source Sans 3"/>
               </a:rPr>
@@ -4481,7 +4481,7 @@
     <p:bg>
       <p:bgPr>
         <a:solidFill>
-          <a:srgbClr val="F4F1EA"/>
+          <a:srgbClr val="F3F1EA"/>
         </a:solidFill>
         <a:effectLst/>
       </p:bgPr>
@@ -4606,7 +4606,7 @@
             <a:r>
               <a:rPr sz="2000" b="1" i="0" spc="200">
                 <a:solidFill>
-                  <a:srgbClr val="156826"/>
+                  <a:srgbClr val="31662F"/>
                 </a:solidFill>
                 <a:latin typeface="Montserrat"/>
               </a:rPr>
@@ -4645,7 +4645,7 @@
             <a:r>
               <a:rPr sz="3800" b="0" i="0">
                 <a:solidFill>
-                  <a:srgbClr val="22371F"/>
+                  <a:srgbClr val="1E3F1D"/>
                 </a:solidFill>
                 <a:latin typeface="Source Sans 3"/>
               </a:rPr>
@@ -4709,7 +4709,7 @@
     <p:bg>
       <p:bgPr>
         <a:solidFill>
-          <a:srgbClr val="156826"/>
+          <a:srgbClr val="31662F"/>
         </a:solidFill>
         <a:effectLst/>
       </p:bgPr>
@@ -4751,7 +4751,7 @@
             <a:r>
               <a:rPr sz="5400" b="1" i="0">
                 <a:solidFill>
-                  <a:srgbClr val="F4F1EA"/>
+                  <a:srgbClr val="F3F1EA"/>
                 </a:solidFill>
                 <a:latin typeface="Montserrat"/>
               </a:rPr>
@@ -4790,7 +4790,7 @@
             <a:r>
               <a:rPr sz="3400" b="0" i="0">
                 <a:solidFill>
-                  <a:srgbClr val="DBE6A7"/>
+                  <a:srgbClr val="B1BCB1"/>
                 </a:solidFill>
                 <a:latin typeface="Source Sans 3"/>
               </a:rPr>
@@ -4838,7 +4838,7 @@
             </a:pathLst>
           </a:custGeom>
           <a:solidFill>
-            <a:srgbClr val="F4F1EA"/>
+            <a:srgbClr val="F3F1EA"/>
           </a:solidFill>
           <a:ln>
             <a:noFill/>
@@ -4906,7 +4906,7 @@
             </a:pathLst>
           </a:custGeom>
           <a:solidFill>
-            <a:srgbClr val="156826"/>
+            <a:srgbClr val="31662F"/>
           </a:solidFill>
           <a:ln>
             <a:noFill/>
@@ -4965,7 +4965,7 @@
             <a:r>
               <a:rPr sz="2200" b="1" i="0">
                 <a:solidFill>
-                  <a:srgbClr val="F4F1EA"/>
+                  <a:srgbClr val="F3F1EA"/>
                 </a:solidFill>
                 <a:latin typeface="Montserrat"/>
               </a:rPr>
@@ -5010,7 +5010,7 @@
             </a:pathLst>
           </a:custGeom>
           <a:solidFill>
-            <a:srgbClr val="F4F1EA"/>
+            <a:srgbClr val="F3F1EA"/>
           </a:solidFill>
           <a:ln>
             <a:noFill/>
@@ -5072,7 +5072,7 @@
             </a:pathLst>
           </a:custGeom>
           <a:solidFill>
-            <a:srgbClr val="156826"/>
+            <a:srgbClr val="31662F"/>
           </a:solidFill>
           <a:ln>
             <a:noFill/>
@@ -5131,7 +5131,7 @@
             <a:r>
               <a:rPr sz="2200" b="1" i="0">
                 <a:solidFill>
-                  <a:srgbClr val="F4F1EA"/>
+                  <a:srgbClr val="F3F1EA"/>
                 </a:solidFill>
                 <a:latin typeface="Montserrat"/>
               </a:rPr>
@@ -5194,7 +5194,7 @@
             <a:r>
               <a:rPr sz="2000" b="0" i="0">
                 <a:solidFill>
-                  <a:srgbClr val="F4F1EA">
+                  <a:srgbClr val="F3F1EA">
                     <a:alpha val="60000"/>
                   </a:srgbClr>
                 </a:solidFill>

--- a/templates/posts/october/2026-10-20-tue-ig-foundation-courses.pptx
+++ b/templates/posts/october/2026-10-20-tue-ig-foundation-courses.pptx
@@ -3802,7 +3802,7 @@
       <p:grpSpPr/>
       <p:pic>
         <p:nvPicPr>
-          <p:cNvPr id="2" name="Picture 1" descr="8595789999434943757.jpg"/>
+          <p:cNvPr id="2" name="Picture 1" descr="2482641731443005909.jpg"/>
           <p:cNvPicPr>
             <a:picLocks noChangeAspect="1"/>
           </p:cNvPicPr>
